--- a/docker_kubernetes_istio.pptx
+++ b/docker_kubernetes_istio.pptx
@@ -10094,7 +10094,7 @@
         </p:nvSpPr>
         <p:spPr>
           <a:xfrm>
-            <a:off x="194870" y="2338451"/>
+            <a:off x="194870" y="2236851"/>
             <a:ext cx="11892197" cy="2031325"/>
           </a:xfrm>
           <a:prstGeom prst="rect">
@@ -10421,7 +10421,7 @@
         </p:nvSpPr>
         <p:spPr>
           <a:xfrm>
-            <a:off x="194871" y="4799346"/>
+            <a:off x="194871" y="4636786"/>
             <a:ext cx="11892197" cy="2031325"/>
           </a:xfrm>
           <a:prstGeom prst="rect">
@@ -10768,7 +10768,7 @@
         </p:nvSpPr>
         <p:spPr>
           <a:xfrm>
-            <a:off x="194870" y="985551"/>
+            <a:off x="194870" y="894111"/>
             <a:ext cx="10268266" cy="923330"/>
           </a:xfrm>
           <a:prstGeom prst="rect">
